--- a/slides/session2/02-memory-model.pptx
+++ b/slides/session2/02-memory-model.pptx
@@ -15,6 +15,11 @@
     <p:sldId id="642" r:id="rId3"/>
     <p:sldId id="644" r:id="rId4"/>
     <p:sldId id="471" r:id="rId5"/>
+    <p:sldId id="645" r:id="rId12"/>
+    <p:sldId id="646" r:id="rId13"/>
+    <p:sldId id="647" r:id="rId14"/>
+    <p:sldId id="648" r:id="rId15"/>
+    <p:sldId id="649" r:id="rId16"/>
   </p:sldIdLst>
   <p:sldSz cx="12192000" cy="6858000" type="screen4x3"/>
   <p:notesSz cx="6946900" cy="9232900"/>
@@ -10045,6 +10050,1097 @@
           </p:txBody>
         </p:sp>
       </p:grpSp>
+    </p:spTree>
+  </p:cSld>
+  <p:clrMapOvr>
+    <a:masterClrMapping/>
+  </p:clrMapOvr>
+</p:sld>
+</file>
+
+<file path=ppt/slides/slide5.xml><?xml version="1.0" encoding="utf-8"?>
+<p:sld xmlns:a="http://schemas.openxmlformats.org/drawingml/2006/main" xmlns:p="http://schemas.openxmlformats.org/presentationml/2006/main" xmlns:r="http://schemas.openxmlformats.org/officeDocument/2006/relationships">
+  <p:cSld>
+    <p:spTree>
+      <p:nvGrpSpPr>
+        <p:cNvPr id="1" name=""/>
+        <p:cNvGrpSpPr/>
+        <p:nvPr/>
+      </p:nvGrpSpPr>
+      <p:grpSpPr/>
+      <p:sp>
+        <p:nvSpPr>
+          <p:cNvPr id="2" name="TextBox 1"/>
+          <p:cNvSpPr txBox="1"/>
+          <p:nvPr/>
+        </p:nvSpPr>
+        <p:spPr>
+          <a:xfrm>
+            <a:off x="548640" y="365760"/>
+            <a:ext cx="11064240" cy="1005840"/>
+          </a:xfrm>
+          <a:prstGeom prst="rect">
+            <a:avLst/>
+          </a:prstGeom>
+          <a:noFill/>
+        </p:spPr>
+        <p:txBody>
+          <a:bodyPr wrap="square">
+            <a:spAutoFit/>
+          </a:bodyPr>
+          <a:lstStyle/>
+          <a:p>
+            <a:r>
+              <a:rPr sz="3600" b="1">
+                <a:solidFill>
+                  <a:srgbClr val="5A0A7A"/>
+                </a:solidFill>
+              </a:rPr>
+              <a:t>From this model to Lab 2</a:t>
+            </a:r>
+          </a:p>
+        </p:txBody>
+      </p:sp>
+      <p:sp>
+        <p:nvSpPr>
+          <p:cNvPr id="3" name="TextBox 2"/>
+          <p:cNvSpPr txBox="1"/>
+          <p:nvPr/>
+        </p:nvSpPr>
+        <p:spPr>
+          <a:xfrm>
+            <a:off x="731520" y="1463040"/>
+            <a:ext cx="10789920" cy="5120640"/>
+          </a:xfrm>
+          <a:prstGeom prst="rect">
+            <a:avLst/>
+          </a:prstGeom>
+          <a:noFill/>
+        </p:spPr>
+        <p:txBody>
+          <a:bodyPr wrap="square">
+            <a:spAutoFit/>
+          </a:bodyPr>
+          <a:lstStyle/>
+          <a:p>
+            <a:pPr>
+              <a:spcAft>
+                <a:spcPts val="800"/>
+              </a:spcAft>
+            </a:pPr>
+            <a:r>
+              <a:rPr sz="2200">
+                <a:solidFill>
+                  <a:srgbClr val="212121"/>
+                </a:solidFill>
+              </a:rPr>
+              <a:t>The slides before this one are the theory; tonight's files are the practice:</a:t>
+            </a:r>
+          </a:p>
+          <a:p>
+            <a:pPr lvl="1">
+              <a:spcAft>
+                <a:spcPts val="800"/>
+              </a:spcAft>
+            </a:pPr>
+            <a:r>
+              <a:rPr sz="2000">
+                <a:solidFill>
+                  <a:srgbClr val="212121"/>
+                </a:solidFill>
+              </a:rPr>
+              <a:t>bounds encoding  →  overflow.c, vla.c</a:t>
+            </a:r>
+          </a:p>
+          <a:p>
+            <a:pPr lvl="1">
+              <a:spcAft>
+                <a:spcPts val="800"/>
+              </a:spcAft>
+            </a:pPr>
+            <a:r>
+              <a:rPr sz="2000">
+                <a:solidFill>
+                  <a:srgbClr val="212121"/>
+                </a:solidFill>
+              </a:rPr>
+              <a:t>allocation tracking  →  leak.c</a:t>
+            </a:r>
+          </a:p>
+          <a:p>
+            <a:pPr lvl="1">
+              <a:spcAft>
+                <a:spcPts val="800"/>
+              </a:spcAft>
+            </a:pPr>
+            <a:r>
+              <a:rPr sz="2000">
+                <a:solidFill>
+                  <a:srgbClr val="212121"/>
+                </a:solidFill>
+              </a:rPr>
+              <a:t>library models (gets)  →  getpassword.c</a:t>
+            </a:r>
+          </a:p>
+          <a:p>
+            <a:pPr>
+              <a:spcAft>
+                <a:spcPts val="800"/>
+              </a:spcAft>
+            </a:pPr>
+            <a:r>
+              <a:rPr sz="2200">
+                <a:solidFill>
+                  <a:srgbClr val="212121"/>
+                </a:solidFill>
+              </a:rPr>
+              <a:t/>
+            </a:r>
+          </a:p>
+          <a:p>
+            <a:pPr>
+              <a:spcAft>
+                <a:spcPts val="800"/>
+              </a:spcAft>
+            </a:pPr>
+            <a:r>
+              <a:rPr sz="2200">
+                <a:solidFill>
+                  <a:srgbClr val="212121"/>
+                </a:solidFill>
+              </a:rPr>
+              <a:t>The next four slides say what ESBMC checks automatically, in workshop words.</a:t>
+            </a:r>
+          </a:p>
+        </p:txBody>
+      </p:sp>
+    </p:spTree>
+  </p:cSld>
+  <p:clrMapOvr>
+    <a:masterClrMapping/>
+  </p:clrMapOvr>
+</p:sld>
+</file>
+
+<file path=ppt/slides/slide6.xml><?xml version="1.0" encoding="utf-8"?>
+<p:sld xmlns:a="http://schemas.openxmlformats.org/drawingml/2006/main" xmlns:p="http://schemas.openxmlformats.org/presentationml/2006/main" xmlns:r="http://schemas.openxmlformats.org/officeDocument/2006/relationships">
+  <p:cSld>
+    <p:spTree>
+      <p:nvGrpSpPr>
+        <p:cNvPr id="1" name=""/>
+        <p:cNvGrpSpPr/>
+        <p:nvPr/>
+      </p:nvGrpSpPr>
+      <p:grpSpPr/>
+      <p:sp>
+        <p:nvSpPr>
+          <p:cNvPr id="2" name="TextBox 1"/>
+          <p:cNvSpPr txBox="1"/>
+          <p:nvPr/>
+        </p:nvSpPr>
+        <p:spPr>
+          <a:xfrm>
+            <a:off x="548640" y="365760"/>
+            <a:ext cx="11064240" cy="1005840"/>
+          </a:xfrm>
+          <a:prstGeom prst="rect">
+            <a:avLst/>
+          </a:prstGeom>
+          <a:noFill/>
+        </p:spPr>
+        <p:txBody>
+          <a:bodyPr wrap="square">
+            <a:spAutoFit/>
+          </a:bodyPr>
+          <a:lstStyle/>
+          <a:p>
+            <a:r>
+              <a:rPr sz="3600" b="1">
+                <a:solidFill>
+                  <a:srgbClr val="5A0A7A"/>
+                </a:solidFill>
+              </a:rPr>
+              <a:t>Every access gets a guard</a:t>
+            </a:r>
+          </a:p>
+        </p:txBody>
+      </p:sp>
+      <p:sp>
+        <p:nvSpPr>
+          <p:cNvPr id="3" name="TextBox 2"/>
+          <p:cNvSpPr txBox="1"/>
+          <p:nvPr/>
+        </p:nvSpPr>
+        <p:spPr>
+          <a:xfrm>
+            <a:off x="731520" y="1463040"/>
+            <a:ext cx="10789920" cy="5120640"/>
+          </a:xfrm>
+          <a:prstGeom prst="rect">
+            <a:avLst/>
+          </a:prstGeom>
+          <a:noFill/>
+        </p:spPr>
+        <p:txBody>
+          <a:bodyPr wrap="square">
+            <a:spAutoFit/>
+          </a:bodyPr>
+          <a:lstStyle/>
+          <a:p>
+            <a:pPr>
+              <a:spcAft>
+                <a:spcPts val="0"/>
+              </a:spcAft>
+            </a:pPr>
+            <a:r>
+              <a:rPr sz="1800">
+                <a:solidFill>
+                  <a:srgbClr val="212121"/>
+                </a:solidFill>
+                <a:latin typeface="Courier New"/>
+              </a:rPr>
+              <a:t>int a[2];  ...  a[i] = 0;</a:t>
+            </a:r>
+          </a:p>
+          <a:p>
+            <a:pPr>
+              <a:spcAft>
+                <a:spcPts val="800"/>
+              </a:spcAft>
+            </a:pPr>
+            <a:r>
+              <a:rPr sz="2200">
+                <a:solidFill>
+                  <a:srgbClr val="212121"/>
+                </a:solidFill>
+              </a:rPr>
+              <a:t/>
+            </a:r>
+          </a:p>
+          <a:p>
+            <a:pPr>
+              <a:spcAft>
+                <a:spcPts val="800"/>
+              </a:spcAft>
+            </a:pPr>
+            <a:r>
+              <a:rPr sz="2200">
+                <a:solidFill>
+                  <a:srgbClr val="212121"/>
+                </a:solidFill>
+              </a:rPr>
+              <a:t>For every dereference ESBMC adds checks like:</a:t>
+            </a:r>
+          </a:p>
+          <a:p>
+            <a:pPr lvl="1">
+              <a:spcAft>
+                <a:spcPts val="0"/>
+              </a:spcAft>
+            </a:pPr>
+            <a:r>
+              <a:rPr sz="1800">
+                <a:solidFill>
+                  <a:srgbClr val="212121"/>
+                </a:solidFill>
+                <a:latin typeface="Courier New"/>
+              </a:rPr>
+              <a:t>0 &lt;= i &amp;&amp; i &lt; 2          /* index inside the object */</a:t>
+            </a:r>
+          </a:p>
+          <a:p>
+            <a:pPr lvl="1">
+              <a:spcAft>
+                <a:spcPts val="800"/>
+              </a:spcAft>
+            </a:pPr>
+            <a:r>
+              <a:rPr sz="2000">
+                <a:solidFill>
+                  <a:srgbClr val="212121"/>
+                </a:solidFill>
+              </a:rPr>
+              <a:t>p points into a live object</a:t>
+            </a:r>
+          </a:p>
+          <a:p>
+            <a:pPr>
+              <a:spcAft>
+                <a:spcPts val="800"/>
+              </a:spcAft>
+            </a:pPr>
+            <a:r>
+              <a:rPr sz="2200">
+                <a:solidFill>
+                  <a:srgbClr val="212121"/>
+                </a:solidFill>
+              </a:rPr>
+              <a:t/>
+            </a:r>
+          </a:p>
+          <a:p>
+            <a:pPr>
+              <a:spcAft>
+                <a:spcPts val="800"/>
+              </a:spcAft>
+            </a:pPr>
+            <a:r>
+              <a:rPr sz="2200">
+                <a:solidFill>
+                  <a:srgbClr val="212121"/>
+                </a:solidFill>
+              </a:rPr>
+              <a:t>A failed guard prints as:</a:t>
+            </a:r>
+          </a:p>
+          <a:p>
+            <a:pPr lvl="1">
+              <a:spcAft>
+                <a:spcPts val="0"/>
+              </a:spcAft>
+            </a:pPr>
+            <a:r>
+              <a:rPr sz="1800">
+                <a:solidFill>
+                  <a:srgbClr val="212121"/>
+                </a:solidFill>
+                <a:latin typeface="Courier New"/>
+              </a:rPr>
+              <a:t>dereference failure: array bounds violated</a:t>
+            </a:r>
+          </a:p>
+          <a:p>
+            <a:pPr>
+              <a:spcAft>
+                <a:spcPts val="800"/>
+              </a:spcAft>
+            </a:pPr>
+            <a:r>
+              <a:rPr sz="2200">
+                <a:solidFill>
+                  <a:srgbClr val="212121"/>
+                </a:solidFill>
+              </a:rPr>
+              <a:t/>
+            </a:r>
+          </a:p>
+          <a:p>
+            <a:pPr>
+              <a:spcAft>
+                <a:spcPts val="800"/>
+              </a:spcAft>
+            </a:pPr>
+            <a:r>
+              <a:rPr sz="2200">
+                <a:solidFill>
+                  <a:srgbClr val="212121"/>
+                </a:solidFill>
+              </a:rPr>
+              <a:t>Uninitialised i means the solver may pick ANY of the 2³² values — including -1 (overflow.c).</a:t>
+            </a:r>
+          </a:p>
+        </p:txBody>
+      </p:sp>
+    </p:spTree>
+  </p:cSld>
+  <p:clrMapOvr>
+    <a:masterClrMapping/>
+  </p:clrMapOvr>
+</p:sld>
+</file>
+
+<file path=ppt/slides/slide7.xml><?xml version="1.0" encoding="utf-8"?>
+<p:sld xmlns:a="http://schemas.openxmlformats.org/drawingml/2006/main" xmlns:p="http://schemas.openxmlformats.org/presentationml/2006/main" xmlns:r="http://schemas.openxmlformats.org/officeDocument/2006/relationships">
+  <p:cSld>
+    <p:spTree>
+      <p:nvGrpSpPr>
+        <p:cNvPr id="1" name=""/>
+        <p:cNvGrpSpPr/>
+        <p:nvPr/>
+      </p:nvGrpSpPr>
+      <p:grpSpPr/>
+      <p:sp>
+        <p:nvSpPr>
+          <p:cNvPr id="2" name="TextBox 1"/>
+          <p:cNvSpPr txBox="1"/>
+          <p:nvPr/>
+        </p:nvSpPr>
+        <p:spPr>
+          <a:xfrm>
+            <a:off x="548640" y="365760"/>
+            <a:ext cx="11064240" cy="1005840"/>
+          </a:xfrm>
+          <a:prstGeom prst="rect">
+            <a:avLst/>
+          </a:prstGeom>
+          <a:noFill/>
+        </p:spPr>
+        <p:txBody>
+          <a:bodyPr wrap="square">
+            <a:spAutoFit/>
+          </a:bodyPr>
+          <a:lstStyle/>
+          <a:p>
+            <a:r>
+              <a:rPr sz="3600" b="1">
+                <a:solidFill>
+                  <a:srgbClr val="5A0A7A"/>
+                </a:solidFill>
+              </a:rPr>
+              <a:t>What --memory-leak-check adds</a:t>
+            </a:r>
+          </a:p>
+        </p:txBody>
+      </p:sp>
+      <p:sp>
+        <p:nvSpPr>
+          <p:cNvPr id="3" name="TextBox 2"/>
+          <p:cNvSpPr txBox="1"/>
+          <p:nvPr/>
+        </p:nvSpPr>
+        <p:spPr>
+          <a:xfrm>
+            <a:off x="731520" y="1463040"/>
+            <a:ext cx="10789920" cy="5120640"/>
+          </a:xfrm>
+          <a:prstGeom prst="rect">
+            <a:avLst/>
+          </a:prstGeom>
+          <a:noFill/>
+        </p:spPr>
+        <p:txBody>
+          <a:bodyPr wrap="square">
+            <a:spAutoFit/>
+          </a:bodyPr>
+          <a:lstStyle/>
+          <a:p>
+            <a:pPr>
+              <a:spcAft>
+                <a:spcPts val="800"/>
+              </a:spcAft>
+            </a:pPr>
+            <a:r>
+              <a:rPr sz="2200">
+                <a:solidFill>
+                  <a:srgbClr val="212121"/>
+                </a:solidFill>
+              </a:rPr>
+              <a:t>Each malloc creates a tracked dynamic object.</a:t>
+            </a:r>
+          </a:p>
+          <a:p>
+            <a:pPr>
+              <a:spcAft>
+                <a:spcPts val="800"/>
+              </a:spcAft>
+            </a:pPr>
+            <a:r>
+              <a:rPr sz="2200">
+                <a:solidFill>
+                  <a:srgbClr val="212121"/>
+                </a:solidFill>
+              </a:rPr>
+              <a:t>At every program exit: each still-allocated object must still be reachable through some pointer.</a:t>
+            </a:r>
+          </a:p>
+          <a:p>
+            <a:pPr>
+              <a:spcAft>
+                <a:spcPts val="800"/>
+              </a:spcAft>
+            </a:pPr>
+            <a:r>
+              <a:rPr sz="2200">
+                <a:solidFill>
+                  <a:srgbClr val="212121"/>
+                </a:solidFill>
+              </a:rPr>
+              <a:t/>
+            </a:r>
+          </a:p>
+          <a:p>
+            <a:pPr>
+              <a:spcAft>
+                <a:spcPts val="800"/>
+              </a:spcAft>
+            </a:pPr>
+            <a:r>
+              <a:rPr sz="2200">
+                <a:solidFill>
+                  <a:srgbClr val="212121"/>
+                </a:solidFill>
+              </a:rPr>
+              <a:t>When no pointer to a live object remains, the trace names it:</a:t>
+            </a:r>
+          </a:p>
+          <a:p>
+            <a:pPr lvl="1">
+              <a:spcAft>
+                <a:spcPts val="0"/>
+              </a:spcAft>
+            </a:pPr>
+            <a:r>
+              <a:rPr sz="1800">
+                <a:solidFill>
+                  <a:srgbClr val="212121"/>
+                </a:solidFill>
+                <a:latin typeface="Courier New"/>
+              </a:rPr>
+              <a:t>dereference failure: forgotten memory: dynamic_1_array</a:t>
+            </a:r>
+          </a:p>
+          <a:p>
+            <a:pPr lvl="1">
+              <a:spcAft>
+                <a:spcPts val="0"/>
+              </a:spcAft>
+            </a:pPr>
+            <a:r>
+              <a:rPr sz="1800">
+                <a:solidFill>
+                  <a:srgbClr val="212121"/>
+                </a:solidFill>
+                <a:latin typeface="Courier New"/>
+              </a:rPr>
+              <a:t>CWE: CWE-401</a:t>
+            </a:r>
+          </a:p>
+          <a:p>
+            <a:pPr lvl="1">
+              <a:spcAft>
+                <a:spcPts val="800"/>
+              </a:spcAft>
+            </a:pPr>
+            <a:r>
+              <a:rPr sz="2000">
+                <a:solidFill>
+                  <a:srgbClr val="212121"/>
+                </a:solidFill>
+              </a:rPr>
+              <a:t>Which statement in leak.c orphans that object? That is task 1.</a:t>
+            </a:r>
+          </a:p>
+          <a:p>
+            <a:pPr>
+              <a:spcAft>
+                <a:spcPts val="800"/>
+              </a:spcAft>
+            </a:pPr>
+            <a:r>
+              <a:rPr sz="2200">
+                <a:solidFill>
+                  <a:srgbClr val="212121"/>
+                </a:solidFill>
+              </a:rPr>
+              <a:t/>
+            </a:r>
+          </a:p>
+          <a:p>
+            <a:pPr>
+              <a:spcAft>
+                <a:spcPts val="800"/>
+              </a:spcAft>
+            </a:pPr>
+            <a:r>
+              <a:rPr sz="2200">
+                <a:solidFill>
+                  <a:srgbClr val="212121"/>
+                </a:solidFill>
+              </a:rPr>
+              <a:t>A leak is unreachable memory — not merely un-freed memory.</a:t>
+            </a:r>
+          </a:p>
+        </p:txBody>
+      </p:sp>
+    </p:spTree>
+  </p:cSld>
+  <p:clrMapOvr>
+    <a:masterClrMapping/>
+  </p:clrMapOvr>
+</p:sld>
+</file>
+
+<file path=ppt/slides/slide8.xml><?xml version="1.0" encoding="utf-8"?>
+<p:sld xmlns:a="http://schemas.openxmlformats.org/drawingml/2006/main" xmlns:p="http://schemas.openxmlformats.org/presentationml/2006/main" xmlns:r="http://schemas.openxmlformats.org/officeDocument/2006/relationships">
+  <p:cSld>
+    <p:spTree>
+      <p:nvGrpSpPr>
+        <p:cNvPr id="1" name=""/>
+        <p:cNvGrpSpPr/>
+        <p:nvPr/>
+      </p:nvGrpSpPr>
+      <p:grpSpPr/>
+      <p:sp>
+        <p:nvSpPr>
+          <p:cNvPr id="2" name="TextBox 1"/>
+          <p:cNvSpPr txBox="1"/>
+          <p:nvPr/>
+        </p:nvSpPr>
+        <p:spPr>
+          <a:xfrm>
+            <a:off x="548640" y="365760"/>
+            <a:ext cx="11064240" cy="1005840"/>
+          </a:xfrm>
+          <a:prstGeom prst="rect">
+            <a:avLst/>
+          </a:prstGeom>
+          <a:noFill/>
+        </p:spPr>
+        <p:txBody>
+          <a:bodyPr wrap="square">
+            <a:spAutoFit/>
+          </a:bodyPr>
+          <a:lstStyle/>
+          <a:p>
+            <a:r>
+              <a:rPr sz="3600" b="1">
+                <a:solidFill>
+                  <a:srgbClr val="5A0A7A"/>
+                </a:solidFill>
+              </a:rPr>
+              <a:t>VLAs and symbolic sizes</a:t>
+            </a:r>
+          </a:p>
+        </p:txBody>
+      </p:sp>
+      <p:sp>
+        <p:nvSpPr>
+          <p:cNvPr id="3" name="TextBox 2"/>
+          <p:cNvSpPr txBox="1"/>
+          <p:nvPr/>
+        </p:nvSpPr>
+        <p:spPr>
+          <a:xfrm>
+            <a:off x="731520" y="1463040"/>
+            <a:ext cx="10789920" cy="5120640"/>
+          </a:xfrm>
+          <a:prstGeom prst="rect">
+            <a:avLst/>
+          </a:prstGeom>
+          <a:noFill/>
+        </p:spPr>
+        <p:txBody>
+          <a:bodyPr wrap="square">
+            <a:spAutoFit/>
+          </a:bodyPr>
+          <a:lstStyle/>
+          <a:p>
+            <a:pPr>
+              <a:spcAft>
+                <a:spcPts val="0"/>
+              </a:spcAft>
+            </a:pPr>
+            <a:r>
+              <a:rPr sz="1800">
+                <a:solidFill>
+                  <a:srgbClr val="212121"/>
+                </a:solidFill>
+                <a:latin typeface="Courier New"/>
+              </a:rPr>
+              <a:t>int a[n];   /* n is a runtime value — maybe nondet */</a:t>
+            </a:r>
+          </a:p>
+          <a:p>
+            <a:pPr>
+              <a:spcAft>
+                <a:spcPts val="800"/>
+              </a:spcAft>
+            </a:pPr>
+            <a:r>
+              <a:rPr sz="2200">
+                <a:solidFill>
+                  <a:srgbClr val="212121"/>
+                </a:solidFill>
+              </a:rPr>
+              <a:t/>
+            </a:r>
+          </a:p>
+          <a:p>
+            <a:pPr>
+              <a:spcAft>
+                <a:spcPts val="800"/>
+              </a:spcAft>
+            </a:pPr>
+            <a:r>
+              <a:rPr sz="2200">
+                <a:solidFill>
+                  <a:srgbClr val="212121"/>
+                </a:solidFill>
+              </a:rPr>
+              <a:t>Bounds checks become symbolic comparisons against n — the solver searches all sizes at once.</a:t>
+            </a:r>
+          </a:p>
+          <a:p>
+            <a:pPr lvl="1">
+              <a:spcAft>
+                <a:spcPts val="800"/>
+              </a:spcAft>
+            </a:pPr>
+            <a:r>
+              <a:rPr sz="2000">
+                <a:solidFill>
+                  <a:srgbClr val="212121"/>
+                </a:solidFill>
+              </a:rPr>
+              <a:t>A zero-sized VLA is undefined behaviour before any element is touched. Does any call here create one?</a:t>
+            </a:r>
+          </a:p>
+          <a:p>
+            <a:pPr lvl="1">
+              <a:spcAft>
+                <a:spcPts val="800"/>
+              </a:spcAft>
+            </a:pPr>
+            <a:r>
+              <a:rPr sz="2000">
+                <a:solidFill>
+                  <a:srgbClr val="212121"/>
+                </a:solidFill>
+              </a:rPr>
+              <a:t>Your unwind bound must cover the loop that does the access — count its iterations before you pick.</a:t>
+            </a:r>
+          </a:p>
+        </p:txBody>
+      </p:sp>
+    </p:spTree>
+  </p:cSld>
+  <p:clrMapOvr>
+    <a:masterClrMapping/>
+  </p:clrMapOvr>
+</p:sld>
+</file>
+
+<file path=ppt/slides/slide9.xml><?xml version="1.0" encoding="utf-8"?>
+<p:sld xmlns:a="http://schemas.openxmlformats.org/drawingml/2006/main" xmlns:p="http://schemas.openxmlformats.org/presentationml/2006/main" xmlns:r="http://schemas.openxmlformats.org/officeDocument/2006/relationships">
+  <p:cSld>
+    <p:spTree>
+      <p:nvGrpSpPr>
+        <p:cNvPr id="1" name=""/>
+        <p:cNvGrpSpPr/>
+        <p:nvPr/>
+      </p:nvGrpSpPr>
+      <p:grpSpPr/>
+      <p:sp>
+        <p:nvSpPr>
+          <p:cNvPr id="2" name="TextBox 1"/>
+          <p:cNvSpPr txBox="1"/>
+          <p:nvPr/>
+        </p:nvSpPr>
+        <p:spPr>
+          <a:xfrm>
+            <a:off x="548640" y="365760"/>
+            <a:ext cx="11064240" cy="1005840"/>
+          </a:xfrm>
+          <a:prstGeom prst="rect">
+            <a:avLst/>
+          </a:prstGeom>
+          <a:noFill/>
+        </p:spPr>
+        <p:txBody>
+          <a:bodyPr wrap="square">
+            <a:spAutoFit/>
+          </a:bodyPr>
+          <a:lstStyle/>
+          <a:p>
+            <a:r>
+              <a:rPr sz="3600" b="1">
+                <a:solidFill>
+                  <a:srgbClr val="5A0A7A"/>
+                </a:solidFill>
+              </a:rPr>
+              <a:t>The CWE labels, decoded</a:t>
+            </a:r>
+          </a:p>
+        </p:txBody>
+      </p:sp>
+      <p:graphicFrame>
+        <p:nvGraphicFramePr>
+          <p:cNvPr id="3" name="Table 2"/>
+          <p:cNvGraphicFramePr>
+            <a:graphicFrameLocks noGrp="1"/>
+          </p:cNvGraphicFramePr>
+          <p:nvPr/>
+        </p:nvGraphicFramePr>
+        <p:xfrm>
+          <a:off x="731520" y="1463040"/>
+          <a:ext cx="9601200" cy="2926080"/>
+        </p:xfrm>
+        <a:graphic>
+          <a:graphicData uri="http://schemas.openxmlformats.org/drawingml/2006/table">
+            <a:tbl>
+              <a:tblPr firstRow="1" bandRow="1">
+                <a:tableStyleId>{5C22544A-7EE6-4342-B048-85BDC9FD1C3A}</a:tableStyleId>
+              </a:tblPr>
+              <a:tblGrid>
+                <a:gridCol w="1828800"/>
+                <a:gridCol w="7772400"/>
+              </a:tblGrid>
+              <a:tr h="365760">
+                <a:tc>
+                  <a:txBody>
+                    <a:bodyPr/>
+                    <a:lstStyle/>
+                    <a:p>
+                      <a:r>
+                        <a:rPr sz="1600" b="1"/>
+                        <a:t>CWE</a:t>
+                      </a:r>
+                    </a:p>
+                  </a:txBody>
+                  <a:tcPr/>
+                </a:tc>
+                <a:tc>
+                  <a:txBody>
+                    <a:bodyPr/>
+                    <a:lstStyle/>
+                    <a:p>
+                      <a:r>
+                        <a:rPr sz="1600" b="1"/>
+                        <a:t>Meaning</a:t>
+                      </a:r>
+                    </a:p>
+                  </a:txBody>
+                  <a:tcPr/>
+                </a:tc>
+              </a:tr>
+              <a:tr h="365760">
+                <a:tc>
+                  <a:txBody>
+                    <a:bodyPr/>
+                    <a:lstStyle/>
+                    <a:p>
+                      <a:r>
+                        <a:rPr sz="1600"/>
+                        <a:t>CWE-121</a:t>
+                      </a:r>
+                    </a:p>
+                  </a:txBody>
+                  <a:tcPr/>
+                </a:tc>
+                <a:tc>
+                  <a:txBody>
+                    <a:bodyPr/>
+                    <a:lstStyle/>
+                    <a:p>
+                      <a:r>
+                        <a:rPr sz="1600"/>
+                        <a:t>Stack-based buffer overflow</a:t>
+                      </a:r>
+                    </a:p>
+                  </a:txBody>
+                  <a:tcPr/>
+                </a:tc>
+              </a:tr>
+              <a:tr h="365760">
+                <a:tc>
+                  <a:txBody>
+                    <a:bodyPr/>
+                    <a:lstStyle/>
+                    <a:p>
+                      <a:r>
+                        <a:rPr sz="1600"/>
+                        <a:t>CWE-125</a:t>
+                      </a:r>
+                    </a:p>
+                  </a:txBody>
+                  <a:tcPr/>
+                </a:tc>
+                <a:tc>
+                  <a:txBody>
+                    <a:bodyPr/>
+                    <a:lstStyle/>
+                    <a:p>
+                      <a:r>
+                        <a:rPr sz="1600"/>
+                        <a:t>Out-of-bounds read</a:t>
+                      </a:r>
+                    </a:p>
+                  </a:txBody>
+                  <a:tcPr/>
+                </a:tc>
+              </a:tr>
+              <a:tr h="365760">
+                <a:tc>
+                  <a:txBody>
+                    <a:bodyPr/>
+                    <a:lstStyle/>
+                    <a:p>
+                      <a:r>
+                        <a:rPr sz="1600"/>
+                        <a:t>CWE-129</a:t>
+                      </a:r>
+                    </a:p>
+                  </a:txBody>
+                  <a:tcPr/>
+                </a:tc>
+                <a:tc>
+                  <a:txBody>
+                    <a:bodyPr/>
+                    <a:lstStyle/>
+                    <a:p>
+                      <a:r>
+                        <a:rPr sz="1600"/>
+                        <a:t>Improper validation of array index</a:t>
+                      </a:r>
+                    </a:p>
+                  </a:txBody>
+                  <a:tcPr/>
+                </a:tc>
+              </a:tr>
+              <a:tr h="365760">
+                <a:tc>
+                  <a:txBody>
+                    <a:bodyPr/>
+                    <a:lstStyle/>
+                    <a:p>
+                      <a:r>
+                        <a:rPr sz="1600"/>
+                        <a:t>CWE-131</a:t>
+                      </a:r>
+                    </a:p>
+                  </a:txBody>
+                  <a:tcPr/>
+                </a:tc>
+                <a:tc>
+                  <a:txBody>
+                    <a:bodyPr/>
+                    <a:lstStyle/>
+                    <a:p>
+                      <a:r>
+                        <a:rPr sz="1600"/>
+                        <a:t>Incorrect calculation of buffer size</a:t>
+                      </a:r>
+                    </a:p>
+                  </a:txBody>
+                  <a:tcPr/>
+                </a:tc>
+              </a:tr>
+              <a:tr h="365760">
+                <a:tc>
+                  <a:txBody>
+                    <a:bodyPr/>
+                    <a:lstStyle/>
+                    <a:p>
+                      <a:r>
+                        <a:rPr sz="1600"/>
+                        <a:t>CWE-193</a:t>
+                      </a:r>
+                    </a:p>
+                  </a:txBody>
+                  <a:tcPr/>
+                </a:tc>
+                <a:tc>
+                  <a:txBody>
+                    <a:bodyPr/>
+                    <a:lstStyle/>
+                    <a:p>
+                      <a:r>
+                        <a:rPr sz="1600"/>
+                        <a:t>Off-by-one error</a:t>
+                      </a:r>
+                    </a:p>
+                  </a:txBody>
+                  <a:tcPr/>
+                </a:tc>
+              </a:tr>
+              <a:tr h="365760">
+                <a:tc>
+                  <a:txBody>
+                    <a:bodyPr/>
+                    <a:lstStyle/>
+                    <a:p>
+                      <a:r>
+                        <a:rPr sz="1600"/>
+                        <a:t>CWE-787</a:t>
+                      </a:r>
+                    </a:p>
+                  </a:txBody>
+                  <a:tcPr/>
+                </a:tc>
+                <a:tc>
+                  <a:txBody>
+                    <a:bodyPr/>
+                    <a:lstStyle/>
+                    <a:p>
+                      <a:r>
+                        <a:rPr sz="1600"/>
+                        <a:t>Out-of-bounds write</a:t>
+                      </a:r>
+                    </a:p>
+                  </a:txBody>
+                  <a:tcPr/>
+                </a:tc>
+              </a:tr>
+              <a:tr h="365760">
+                <a:tc>
+                  <a:txBody>
+                    <a:bodyPr/>
+                    <a:lstStyle/>
+                    <a:p>
+                      <a:r>
+                        <a:rPr sz="1600"/>
+                        <a:t>CWE-401</a:t>
+                      </a:r>
+                    </a:p>
+                  </a:txBody>
+                  <a:tcPr/>
+                </a:tc>
+                <a:tc>
+                  <a:txBody>
+                    <a:bodyPr/>
+                    <a:lstStyle/>
+                    <a:p>
+                      <a:r>
+                        <a:rPr sz="1600"/>
+                        <a:t>Memory leak (missing release of memory)</a:t>
+                      </a:r>
+                    </a:p>
+                  </a:txBody>
+                  <a:tcPr/>
+                </a:tc>
+              </a:tr>
+            </a:tbl>
+          </a:graphicData>
+        </a:graphic>
+      </p:graphicFrame>
+      <p:sp>
+        <p:nvSpPr>
+          <p:cNvPr id="4" name="TextBox 3"/>
+          <p:cNvSpPr txBox="1"/>
+          <p:nvPr/>
+        </p:nvSpPr>
+        <p:spPr>
+          <a:xfrm>
+            <a:off x="731520" y="5394960"/>
+            <a:ext cx="10789920" cy="1188719"/>
+          </a:xfrm>
+          <a:prstGeom prst="rect">
+            <a:avLst/>
+          </a:prstGeom>
+          <a:noFill/>
+        </p:spPr>
+        <p:txBody>
+          <a:bodyPr wrap="square">
+            <a:spAutoFit/>
+          </a:bodyPr>
+          <a:lstStyle/>
+          <a:p>
+            <a:pPr>
+              <a:spcAft>
+                <a:spcPts val="800"/>
+              </a:spcAft>
+            </a:pPr>
+            <a:r>
+              <a:rPr sz="1800">
+                <a:solidFill>
+                  <a:srgbClr val="212121"/>
+                </a:solidFill>
+              </a:rPr>
+              <a:t>One violated guard can imply several classes — ESBMC prints them all (getpassword.c prints the first six).</a:t>
+            </a:r>
+          </a:p>
+        </p:txBody>
+      </p:sp>
     </p:spTree>
   </p:cSld>
   <p:clrMapOvr>

--- a/slides/session2/02-memory-model.pptx
+++ b/slides/session2/02-memory-model.pptx
@@ -11092,7 +11092,7 @@
                     <a:p>
                       <a:r>
                         <a:rPr sz="1600"/>
-                        <a:t>Memory leak (missing release of memory)</a:t>
+                        <a:t>Missing release of memory after effective lifetime (a memory leak)</a:t>
                       </a:r>
                     </a:p>
                   </a:txBody>
